--- a/Final.pptx
+++ b/Final.pptx
@@ -137,6 +137,7 @@
     <p1510:client id="{B15EBFFE-349D-8C10-95E0-E424CBE9D32E}" v="165" dt="2026-06-17T10:31:27.693"/>
     <p1510:client id="{B645BBBD-947A-7C72-9DBC-22B83B255327}" v="125" dt="2026-06-17T13:42:19.524"/>
     <p1510:client id="{B7263528-15EF-B1DA-ED32-01E89E2FDEFB}" v="4" dt="2026-06-17T10:16:06.111"/>
+    <p1510:client id="{FCD48506-F5B4-4785-CBCD-152FACEC2516}" v="24" dt="2026-06-18T04:05:41.448"/>
   </p1510:revLst>
 </p1510:revInfo>
 </file>
@@ -222,7 +223,7 @@
           </a:lstStyle>
           <a:p>
             <a:fld id="{82EEA6CB-C57E-491A-96CE-B952AE6437D0}" type="datetimeFigureOut">
-              <a:t>6/18/2026</a:t>
+              <a:t>6/17/2026</a:t>
             </a:fld>
             <a:endParaRPr lang="en-US"/>
           </a:p>
@@ -3961,6 +3962,222 @@
               <a:latin typeface="Calibri"/>
               <a:cs typeface="Calibri"/>
             </a:endParaRPr>
+          </a:p>
+        </p:txBody>
+      </p:sp>
+      <p:sp>
+        <p:nvSpPr>
+          <p:cNvPr id="4" name="Shape 26">
+            <a:extLst>
+              <a:ext uri="{FF2B5EF4-FFF2-40B4-BE49-F238E27FC236}">
+                <a16:creationId xmlns:a16="http://schemas.microsoft.com/office/drawing/2014/main" id="{FAAE73F4-B00F-F35E-6B47-5E4DD203674C}"/>
+              </a:ext>
+            </a:extLst>
+          </p:cNvPr>
+          <p:cNvSpPr/>
+          <p:nvPr/>
+        </p:nvSpPr>
+        <p:spPr>
+          <a:xfrm>
+            <a:off x="6101600" y="1939876"/>
+            <a:ext cx="5734050" cy="1512908"/>
+          </a:xfrm>
+          <a:prstGeom prst="roundRect">
+            <a:avLst>
+              <a:gd name="adj" fmla="val 8475"/>
+            </a:avLst>
+          </a:prstGeom>
+          <a:solidFill>
+            <a:srgbClr val="EAEFF5"/>
+          </a:solidFill>
+          <a:ln w="12700">
+            <a:solidFill>
+              <a:srgbClr val="5B2080"/>
+            </a:solidFill>
+            <a:prstDash val="solid"/>
+          </a:ln>
+        </p:spPr>
+        <p:txBody>
+          <a:bodyPr/>
+          <a:lstStyle/>
+          <a:p>
+            <a:pPr algn="l" rtl="0"/>
+            <a:r>
+              <a:rPr lang="en-US" sz="1600" b="1" i="0" u="none" strike="noStrike" baseline="0">
+                <a:solidFill>
+                  <a:srgbClr val="000000"/>
+                </a:solidFill>
+                <a:latin typeface="Aptos"/>
+                <a:ea typeface="Segoe UI"/>
+                <a:cs typeface="Segoe UI"/>
+              </a:rPr>
+              <a:t>Install via npm</a:t>
+            </a:r>
+            <a:r>
+              <a:rPr lang="en-US" sz="1600" b="0" i="0" u="none" strike="noStrike" baseline="0">
+                <a:solidFill>
+                  <a:srgbClr val="000000"/>
+                </a:solidFill>
+                <a:latin typeface="Aptos"/>
+                <a:ea typeface="Segoe UI"/>
+                <a:cs typeface="Segoe UI"/>
+              </a:rPr>
+              <a:t>​</a:t>
+            </a:r>
+            <a:r>
+              <a:rPr lang="en-US" sz="1600" b="0" i="0">
+                <a:solidFill>
+                  <a:srgbClr val="000000"/>
+                </a:solidFill>
+                <a:latin typeface="Aptos"/>
+                <a:ea typeface="Segoe UI"/>
+                <a:cs typeface="Segoe UI"/>
+              </a:rPr>
+              <a:t>​</a:t>
+            </a:r>
+          </a:p>
+          <a:p>
+            <a:pPr marL="285750" lvl="0" indent="-285750" algn="l" rtl="0">
+              <a:buFont typeface="Arial,Sans-Serif"/>
+              <a:buChar char="•"/>
+            </a:pPr>
+            <a:endParaRPr lang="en-US" b="0" i="0">
+              <a:solidFill>
+                <a:srgbClr val="000000"/>
+              </a:solidFill>
+              <a:latin typeface="Arial"/>
+              <a:ea typeface="Arial"/>
+              <a:cs typeface="Arial"/>
+            </a:endParaRPr>
+          </a:p>
+          <a:p>
+            <a:pPr marL="285750" lvl="0" indent="-285750" algn="l" rtl="0">
+              <a:buFont typeface="Arial,Sans-Serif"/>
+              <a:buChar char="•"/>
+            </a:pPr>
+            <a:r>
+              <a:rPr lang="en-US" sz="1600" b="0" i="0" u="none" strike="noStrike" baseline="0">
+                <a:solidFill>
+                  <a:srgbClr val="000000"/>
+                </a:solidFill>
+                <a:latin typeface="Aptos"/>
+                <a:ea typeface="Arial"/>
+                <a:cs typeface="Arial"/>
+              </a:rPr>
+              <a:t>Run `</a:t>
+            </a:r>
+            <a:r>
+              <a:rPr lang="en-US" sz="1600" b="1" i="0" u="none" strike="noStrike" baseline="0">
+                <a:solidFill>
+                  <a:srgbClr val="000000"/>
+                </a:solidFill>
+                <a:latin typeface="Aptos"/>
+                <a:ea typeface="Arial"/>
+                <a:cs typeface="Arial"/>
+              </a:rPr>
+              <a:t>npm install@aspiresys/visor</a:t>
+            </a:r>
+            <a:r>
+              <a:rPr lang="en-US" sz="1600" b="0" i="0" u="none" strike="noStrike" baseline="0">
+                <a:solidFill>
+                  <a:srgbClr val="000000"/>
+                </a:solidFill>
+                <a:latin typeface="Aptos"/>
+                <a:ea typeface="Arial"/>
+                <a:cs typeface="Arial"/>
+              </a:rPr>
+              <a:t>`</a:t>
+            </a:r>
+            <a:r>
+              <a:rPr lang="en-US" sz="1600" b="0" i="0">
+                <a:solidFill>
+                  <a:srgbClr val="000000"/>
+                </a:solidFill>
+                <a:latin typeface="Aptos"/>
+                <a:ea typeface="Arial"/>
+                <a:cs typeface="Arial"/>
+              </a:rPr>
+              <a:t>​</a:t>
+            </a:r>
+          </a:p>
+          <a:p>
+            <a:pPr marL="285750" lvl="0" indent="-285750" algn="l" rtl="0">
+              <a:buFont typeface="Arial,Sans-Serif"/>
+              <a:buChar char="•"/>
+            </a:pPr>
+            <a:r>
+              <a:rPr lang="en-US" sz="1600" b="0" i="0" u="none" strike="noStrike" baseline="0">
+                <a:solidFill>
+                  <a:srgbClr val="000000"/>
+                </a:solidFill>
+                <a:latin typeface="Aptos"/>
+                <a:ea typeface="Arial"/>
+                <a:cs typeface="Arial"/>
+              </a:rPr>
+              <a:t>Launch it with `</a:t>
+            </a:r>
+            <a:r>
+              <a:rPr lang="en-US" sz="1600" b="1" i="0" u="none" strike="noStrike" baseline="0">
+                <a:solidFill>
+                  <a:srgbClr val="000000"/>
+                </a:solidFill>
+                <a:latin typeface="Aptos"/>
+                <a:ea typeface="Arial"/>
+                <a:cs typeface="Arial"/>
+              </a:rPr>
+              <a:t>npx visor-inspector</a:t>
+            </a:r>
+            <a:r>
+              <a:rPr lang="en-US" sz="1600" b="0" i="0" u="none" strike="noStrike" baseline="0">
+                <a:solidFill>
+                  <a:srgbClr val="000000"/>
+                </a:solidFill>
+                <a:latin typeface="Aptos"/>
+                <a:ea typeface="Arial"/>
+                <a:cs typeface="Arial"/>
+              </a:rPr>
+              <a:t>`.</a:t>
+            </a:r>
+            <a:r>
+              <a:rPr lang="en-US" sz="1600" b="0" i="0">
+                <a:solidFill>
+                  <a:srgbClr val="000000"/>
+                </a:solidFill>
+                <a:latin typeface="Aptos"/>
+                <a:ea typeface="Arial"/>
+                <a:cs typeface="Arial"/>
+              </a:rPr>
+              <a:t>​</a:t>
+            </a:r>
+          </a:p>
+          <a:p>
+            <a:pPr marL="285750" lvl="0" indent="-285750" algn="l" rtl="0">
+              <a:buFont typeface="Arial,Sans-Serif"/>
+              <a:buChar char="•"/>
+            </a:pPr>
+            <a:endParaRPr lang="en-US" b="0" i="0">
+              <a:solidFill>
+                <a:srgbClr val="000000"/>
+              </a:solidFill>
+              <a:latin typeface="Arial"/>
+              <a:ea typeface="Arial"/>
+              <a:cs typeface="Arial"/>
+            </a:endParaRPr>
+          </a:p>
+          <a:p>
+            <a:pPr algn="ctr" rtl="0"/>
+            <a:r>
+              <a:rPr lang="en-US" sz="1800" b="0" i="0">
+                <a:solidFill>
+                  <a:srgbClr val="000000"/>
+                </a:solidFill>
+                <a:latin typeface="Calibri"/>
+                <a:ea typeface="Segoe UI"/>
+                <a:cs typeface="Segoe UI"/>
+              </a:rPr>
+              <a:t>​</a:t>
+            </a:r>
+            <a:endParaRPr lang="en-US"/>
           </a:p>
         </p:txBody>
       </p:sp>
